--- a/media/exports/reports/2026-04/overtime.pptx
+++ b/media/exports/reports/2026-04/overtime.pptx
@@ -229,61 +229,61 @@
                 <c:formatCode>0.0"%";[Red](0.0"%")</c:formatCode>
                 <c:ptCount val="19"/>
                 <c:pt idx="0">
-                  <c:v>1.5</c:v>
+                  <c:v>1.6</c:v>
                 </c:pt>
                 <c:pt idx="1">
-                  <c:v>1.3</c:v>
+                  <c:v>2.7</c:v>
                 </c:pt>
                 <c:pt idx="2">
-                  <c:v>1.9</c:v>
+                  <c:v>2.2</c:v>
                 </c:pt>
                 <c:pt idx="3">
-                  <c:v>2.3</c:v>
+                  <c:v>3.0</c:v>
                 </c:pt>
                 <c:pt idx="4">
-                  <c:v>2.8</c:v>
+                  <c:v>4.6</c:v>
                 </c:pt>
                 <c:pt idx="5">
-                  <c:v>2.4</c:v>
+                  <c:v>4.4</c:v>
                 </c:pt>
                 <c:pt idx="6">
                   <c:v>3.6</c:v>
                 </c:pt>
                 <c:pt idx="7">
-                  <c:v>2.6</c:v>
+                  <c:v>3.7</c:v>
                 </c:pt>
                 <c:pt idx="8">
                   <c:v>2.8</c:v>
                 </c:pt>
                 <c:pt idx="9">
-                  <c:v>2.4</c:v>
+                  <c:v>3.3</c:v>
                 </c:pt>
                 <c:pt idx="10">
-                  <c:v>4.6</c:v>
+                  <c:v>3.3</c:v>
                 </c:pt>
                 <c:pt idx="11">
-                  <c:v>3.0</c:v>
+                  <c:v>3.7</c:v>
                 </c:pt>
                 <c:pt idx="12">
-                  <c:v>4.0</c:v>
+                  <c:v>3.9</c:v>
                 </c:pt>
                 <c:pt idx="13">
-                  <c:v>3.9</c:v>
+                  <c:v>3.8</c:v>
                 </c:pt>
                 <c:pt idx="14">
-                  <c:v>3.5</c:v>
+                  <c:v>7.7</c:v>
                 </c:pt>
                 <c:pt idx="15">
-                  <c:v>3.8</c:v>
+                  <c:v>3.1</c:v>
                 </c:pt>
                 <c:pt idx="16">
-                  <c:v>5.8</c:v>
+                  <c:v>4.2</c:v>
                 </c:pt>
                 <c:pt idx="17">
-                  <c:v>5.6</c:v>
+                  <c:v>4.2</c:v>
                 </c:pt>
                 <c:pt idx="18">
-                  <c:v>5.8</c:v>
+                  <c:v>5.9</c:v>
                 </c:pt>
               </c:numCache>
             </c:numRef>
@@ -332,7 +332,7 @@
         <c:axId val="-2100718248"/>
         <c:scaling>
           <c:orientation val="minMax"/>
-          <c:max val="8.0"/>
+          <c:max val="10.0"/>
           <c:min val="0.0"/>
         </c:scaling>
         <c:delete val="0"/>
@@ -470,10 +470,10 @@
                   <c:v>Short-staffed</c:v>
                 </c:pt>
                 <c:pt idx="2">
-                  <c:v>Installation ran over</c:v>
+                  <c:v>After-hours call-out</c:v>
                 </c:pt>
                 <c:pt idx="3">
-                  <c:v>After-hours call-out</c:v>
+                  <c:v>Installation ran over</c:v>
                 </c:pt>
               </c:strCache>
             </c:strRef>
@@ -485,16 +485,16 @@
                 <c:formatCode>#,##0;[Red](#,##0)</c:formatCode>
                 <c:ptCount val="4"/>
                 <c:pt idx="0">
-                  <c:v>4.5</c:v>
+                  <c:v>2.0</c:v>
                 </c:pt>
                 <c:pt idx="1">
-                  <c:v>8.5</c:v>
+                  <c:v>12.5</c:v>
                 </c:pt>
                 <c:pt idx="2">
-                  <c:v>21.5</c:v>
+                  <c:v>19.5</c:v>
                 </c:pt>
                 <c:pt idx="3">
-                  <c:v>25.5</c:v>
+                  <c:v>26.5</c:v>
                 </c:pt>
               </c:numCache>
             </c:numRef>
@@ -558,7 +558,7 @@
       <c:valAx>
         <c:axId val="-2113994440"/>
         <c:scaling>
-          <c:max val="29.325"/>
+          <c:max val="30.474999999999998"/>
           <c:min val="0.0"/>
         </c:scaling>
         <c:delete/>
@@ -686,22 +686,22 @@
               <c:strCache>
                 <c:ptCount val="7"/>
                 <c:pt idx="0">
-                  <c:v>Technician T3</c:v>
+                  <c:v>Technician T4</c:v>
                 </c:pt>
                 <c:pt idx="1">
                   <c:v>Technician T6</c:v>
                 </c:pt>
                 <c:pt idx="2">
-                  <c:v>Technician T4</c:v>
+                  <c:v>Technician T1</c:v>
                 </c:pt>
                 <c:pt idx="3">
-                  <c:v>Technician T1</c:v>
+                  <c:v>Technician T7</c:v>
                 </c:pt>
                 <c:pt idx="4">
-                  <c:v>Technician T2</c:v>
+                  <c:v>Technician T3</c:v>
                 </c:pt>
                 <c:pt idx="5">
-                  <c:v>Technician T7</c:v>
+                  <c:v>Technician T2</c:v>
                 </c:pt>
                 <c:pt idx="6">
                   <c:v>Technician T5</c:v>
@@ -716,25 +716,25 @@
                 <c:formatCode>#,##0;[Red](#,##0)</c:formatCode>
                 <c:ptCount val="7"/>
                 <c:pt idx="0">
-                  <c:v>5.0</c:v>
+                  <c:v>1.5</c:v>
                 </c:pt>
                 <c:pt idx="1">
-                  <c:v>6.0</c:v>
+                  <c:v>2.5</c:v>
                 </c:pt>
                 <c:pt idx="2">
-                  <c:v>7.0</c:v>
+                  <c:v>9.5</c:v>
                 </c:pt>
                 <c:pt idx="3">
-                  <c:v>8.5</c:v>
+                  <c:v>10.5</c:v>
                 </c:pt>
                 <c:pt idx="4">
-                  <c:v>9.5</c:v>
+                  <c:v>12.0</c:v>
                 </c:pt>
                 <c:pt idx="5">
-                  <c:v>9.5</c:v>
+                  <c:v>12.0</c:v>
                 </c:pt>
                 <c:pt idx="6">
-                  <c:v>14.5</c:v>
+                  <c:v>12.5</c:v>
                 </c:pt>
               </c:numCache>
             </c:numRef>
@@ -798,7 +798,7 @@
       <c:valAx>
         <c:axId val="-2113994440"/>
         <c:scaling>
-          <c:max val="16.674999999999997"/>
+          <c:max val="14.374999999999998"/>
           <c:min val="0.0"/>
         </c:scaling>
         <c:delete/>
@@ -1295,7 +1295,7 @@
           <a:lstStyle/>
           <a:p>
             <a:r>
-              <a:t>Where is overtime creeping up, and why?. Overtime, April: 5.8%; Overtime hours, April: 60.0 h; April last year: 3.6%. Technicians worked 60.0 h of overtime in April, 5.8% of ordinary hours (target under 5.0%), against 5.6% in March. Over the last year it has gone from 3.6% to 5.8%. After-hours call-out is the main reason: 25.5 h, 42.5% of the overtime. Technician T5 carried the most (14.5 h). Above target by 7.9 h.</a:t>
+              <a:t>Where is overtime creeping up, and why?. Overtime, April: 5.9%; Overtime hours, April: 60.5 h; April last year: 3.6%. Technicians worked 60.5 h of overtime in April, 5.9% of ordinary hours (target under 5.0%), against 4.2% in March. Over the last year it has gone from 3.6% to 5.9%. Installation ran over is the main reason: 26.5 h, 43.8% of the overtime. Technician T5 carried the most (12.5 h). Above target by 8.8 h.</a:t>
             </a:r>
           </a:p>
         </p:txBody>
@@ -4850,7 +4850,7 @@
                 </a:solidFill>
                 <a:latin typeface="Roboto"/>
               </a:rPr>
-              <a:t>Data retrieved 2pm, Tue 6 Oct 2026 · Generated 8 Oct 2026, 6:29pm · Sample data · Made with Python (python-pptx)</a:t>
+              <a:t>Data retrieved 2pm, Tue 6 Oct 2026 · Generated 8 Oct 2026, 11:41pm · Sample data · Made with Python (python-pptx)</a:t>
             </a:r>
           </a:p>
         </p:txBody>
@@ -5196,7 +5196,7 @@
                 </a:solidFill>
                 <a:latin typeface="Roboto"/>
               </a:rPr>
-              <a:t>5.8%</a:t>
+              <a:t>5.9%</a:t>
             </a:r>
           </a:p>
         </p:txBody>
@@ -5362,7 +5362,7 @@
                 </a:solidFill>
                 <a:latin typeface="Roboto"/>
               </a:rPr>
-              <a:t>60.0 h</a:t>
+              <a:t>60.5 h</a:t>
             </a:r>
           </a:p>
         </p:txBody>
@@ -5401,7 +5401,7 @@
                 </a:solidFill>
                 <a:latin typeface="Roboto"/>
               </a:rPr>
-              <a:t>March 63.5 h</a:t>
+              <a:t>March 48.5 h</a:t>
             </a:r>
           </a:p>
         </p:txBody>
@@ -5567,7 +5567,7 @@
                 </a:solidFill>
                 <a:latin typeface="Roboto"/>
               </a:rPr>
-              <a:t>34.5 h of overtime</a:t>
+              <a:t>30.5 h of overtime</a:t>
             </a:r>
           </a:p>
         </p:txBody>
@@ -5712,7 +5712,7 @@
                 </a:solidFill>
                 <a:latin typeface="Roboto"/>
               </a:rPr>
-              <a:t>Technicians worked 60.0 h of overtime in April, 5.8% of ordinary hours (target under 5.0%), against 5.6% in March. Over the last year it has gone from 3.6% to 5.8%.</a:t>
+              <a:t>Technicians worked 60.5 h of overtime in April, 5.9% of ordinary hours (target under 5.0%), against 4.2% in March. Over the last year it has gone from 3.6% to 5.9%.</a:t>
             </a:r>
           </a:p>
         </p:txBody>
@@ -5839,7 +5839,7 @@
                 </a:solidFill>
                 <a:latin typeface="Roboto"/>
               </a:rPr>
-              <a:t>After-hours call-out is the main reason: 25.5 h, 42.5% of the overtime. Technician T5 carried the most (14.5 h). Above target by 7.9 h.</a:t>
+              <a:t>Installation ran over is the main reason: 26.5 h, 43.8% of the overtime. Technician T5 carried the most (12.5 h). Above target by 8.8 h.</a:t>
             </a:r>
           </a:p>
         </p:txBody>
@@ -5917,7 +5917,7 @@
                 </a:solidFill>
                 <a:latin typeface="Roboto"/>
               </a:rPr>
-              <a:t>Data retrieved 2pm, Tue 6 Oct 2026 · Generated 8 Oct 2026, 6:29pm · Sample data · Made with Python (python-pptx)</a:t>
+              <a:t>Data retrieved 2pm, Tue 6 Oct 2026 · Generated 8 Oct 2026, 11:41pm · Sample data · Made with Python (python-pptx)</a:t>
             </a:r>
           </a:p>
         </p:txBody>
@@ -6232,7 +6232,7 @@
                 </a:solidFill>
                 <a:latin typeface="Roboto"/>
               </a:rPr>
-              <a:t>Data retrieved 2pm, Tue 6 Oct 2026 · Generated 8 Oct 2026, 6:29pm · Sample data · Made with Python (python-pptx)</a:t>
+              <a:t>Data retrieved 2pm, Tue 6 Oct 2026 · Generated 8 Oct 2026, 11:41pm · Sample data · Made with Python (python-pptx)</a:t>
             </a:r>
           </a:p>
         </p:txBody>
@@ -6547,7 +6547,7 @@
                 </a:solidFill>
                 <a:latin typeface="Roboto"/>
               </a:rPr>
-              <a:t>Data retrieved 2pm, Tue 6 Oct 2026 · Generated 8 Oct 2026, 6:29pm · Sample data · Made with Python (python-pptx)</a:t>
+              <a:t>Data retrieved 2pm, Tue 6 Oct 2026 · Generated 8 Oct 2026, 11:41pm · Sample data · Made with Python (python-pptx)</a:t>
             </a:r>
           </a:p>
         </p:txBody>

--- a/media/exports/reports/2026-04/overtime.pptx
+++ b/media/exports/reports/2026-04/overtime.pptx
@@ -1225,7 +1225,7 @@
           <a:lstStyle/>
           <a:p>
             <a:r>
-              <a:t>Where is overtime creeping up, and why?. Sample Electrical &amp; Air Pty Ltd. Period: April 2026. Each technician's paid hours, day by day: ordinary hours and overtime, with the main reason for the overtime.</a:t>
+              <a:t>Where is overtime creeping up, and why?. Sample Electrical &amp; Air Pty Ltd. Period: April 2026. In short: Overtime was 5.9% of ordinary hours in April (target under 5.0%), up from 3.6% a year earlier. Each technician's paid hours, day by day: ordinary hours and overtime, with the main reason for the overtime.</a:t>
             </a:r>
           </a:p>
         </p:txBody>
@@ -4685,7 +4685,7 @@
                 </a:solidFill>
                 <a:latin typeface="Roboto"/>
               </a:rPr>
-              <a:t>Period: April 2026. Each technician's paid hours, day by day: ordinary hours and overtime, with the main reason for the overtime.</a:t>
+              <a:t>Period: April 2026. In short: Overtime was 5.9% of ordinary hours in April (target under 5.0%), up from 3.6% a year earlier. Each technician's paid hours, day by day: ordinary hours and overtime, with the main reason for the overtime.</a:t>
             </a:r>
           </a:p>
         </p:txBody>
@@ -4850,7 +4850,7 @@
                 </a:solidFill>
                 <a:latin typeface="Roboto"/>
               </a:rPr>
-              <a:t>Data retrieved 2pm, Tue 6 Oct 2026 · Generated 8 Oct 2026, 11:41pm · Sample data · Made with Python (python-pptx)</a:t>
+              <a:t>Data retrieved 2pm, Tue 6 Oct 2026 · Generated 10 Oct 2026, 9:55pm · Sample data · Made with Python (python-pptx)</a:t>
             </a:r>
           </a:p>
         </p:txBody>
@@ -5917,7 +5917,7 @@
                 </a:solidFill>
                 <a:latin typeface="Roboto"/>
               </a:rPr>
-              <a:t>Data retrieved 2pm, Tue 6 Oct 2026 · Generated 8 Oct 2026, 11:41pm · Sample data · Made with Python (python-pptx)</a:t>
+              <a:t>Data retrieved 2pm, Tue 6 Oct 2026 · Generated 10 Oct 2026, 9:55pm · Sample data · Made with Python (python-pptx)</a:t>
             </a:r>
           </a:p>
         </p:txBody>
@@ -6232,7 +6232,7 @@
                 </a:solidFill>
                 <a:latin typeface="Roboto"/>
               </a:rPr>
-              <a:t>Data retrieved 2pm, Tue 6 Oct 2026 · Generated 8 Oct 2026, 11:41pm · Sample data · Made with Python (python-pptx)</a:t>
+              <a:t>Data retrieved 2pm, Tue 6 Oct 2026 · Generated 10 Oct 2026, 9:55pm · Sample data · Made with Python (python-pptx)</a:t>
             </a:r>
           </a:p>
         </p:txBody>
@@ -6547,7 +6547,7 @@
                 </a:solidFill>
                 <a:latin typeface="Roboto"/>
               </a:rPr>
-              <a:t>Data retrieved 2pm, Tue 6 Oct 2026 · Generated 8 Oct 2026, 11:41pm · Sample data · Made with Python (python-pptx)</a:t>
+              <a:t>Data retrieved 2pm, Tue 6 Oct 2026 · Generated 10 Oct 2026, 9:55pm · Sample data · Made with Python (python-pptx)</a:t>
             </a:r>
           </a:p>
         </p:txBody>
